--- a/decks/hist-hastings/hist-hastings_ch5_battle-of-hastings.pptx
+++ b/decks/hist-hastings/hist-hastings_ch5_battle-of-hastings.pptx
@@ -123,36 +123,36 @@
   <p:extLst>
     <p:ext uri="{521415D9-36F7-43E2-AB2F-B90AF26B5E84}">
       <p14:sectionLst xmlns:p14="http://schemas.microsoft.com/office/powerpoint/2010/main">
-        <p14:section name="Opening" id="{b5690327-cef1-e0f4-df5c-748bfa0c490f}">
+        <p14:section name="Opening" id="{5fd0f0d5-166e-eed7-8a61-3de7f5180e09}">
           <p14:sldIdLst>
             <p14:sldId id="256"/>
           </p14:sldIdLst>
         </p14:section>
-        <p14:section name="Gate" id="{873337c7-2edd-f177-f4db-d4a18818c2f0}">
+        <p14:section name="Gate" id="{53753498-3012-e9c1-ee01-bfbbce31b0f6}">
           <p14:sldIdLst>
             <p14:sldId id="257"/>
             <p14:sldId id="258"/>
           </p14:sldIdLst>
         </p14:section>
-        <p14:section name="Pre-teach" id="{713273da-d7d8-89c5-1320-0550aba7c8f7}">
+        <p14:section name="Pre-teach" id="{a3156f62-c6b2-eb10-d79b-80c8dc097d4f}">
           <p14:sldIdLst>
             <p14:sldId id="259"/>
           </p14:sldIdLst>
         </p14:section>
-        <p14:section name="Read-along" id="{07513e76-a711-30c3-7240-0c2eeaa4f079}">
+        <p14:section name="Read-along" id="{080e17da-ec47-1474-b033-c44904940285}">
           <p14:sldIdLst>
             <p14:sldId id="260"/>
             <p14:sldId id="261"/>
           </p14:sldIdLst>
         </p14:section>
-        <p14:section name="Teach" id="{f6e838e3-d22a-aefd-b727-4641c93abb81}">
+        <p14:section name="Teach" id="{c1b16b61-04b0-adef-1544-ad5d4d7321b5}">
           <p14:sldIdLst>
             <p14:sldId id="262"/>
             <p14:sldId id="263"/>
             <p14:sldId id="264"/>
           </p14:sldIdLst>
         </p14:section>
-        <p14:section name="Routes" id="{1ca74272-2a30-0728-fa80-31e03dd43714}">
+        <p14:section name="Routes" id="{4d47841d-f8b1-d638-90ab-881e3e25d834}">
           <p14:sldIdLst>
             <p14:sldId id="265"/>
             <p14:sldId id="266"/>
@@ -160,12 +160,12 @@
             <p14:sldId id="268"/>
           </p14:sldIdLst>
         </p14:section>
-        <p14:section name="Close" id="{2c1aa761-3044-d989-8700-6bce6f286e59}">
+        <p14:section name="Close" id="{091ddd2b-4556-62fb-9f80-d1a5ab11fa2d}">
           <p14:sldIdLst>
             <p14:sldId id="269"/>
           </p14:sldIdLst>
         </p14:section>
-        <p14:section name="Answers" id="{cb4bba4b-53da-9b03-9654-6d3f7d32c779}">
+        <p14:section name="Answers" id="{3540de31-16e4-7a01-6e01-4136563f0842}">
           <p14:sldIdLst>
             <p14:sldId id="270"/>
             <p14:sldId id="271"/>
@@ -1411,7 +1411,7 @@
               <a:rPr lang="en-US" dirty="0"/>
               <a:t>Do now — retrieval. Silent, no notes, no help: recall comes before any support. Give about four minutes.
 1. Harold Godwinson formed a defensive shield wall at the top of ___ Hill.  →  Senlac
-2. How did the Normans finally break Harold's shield wall?  →  A   They pretended to retreat, and English soldiers chased them down the hill
+2. How did the Normans finally break Harold's shield wall?  →  D   They pretended to retreat, and English soldiers chased them down the hill
 3. The Battle of Stamford Bridge was on 25 September 1066 and the Battle of Hastings on 14 October 1066. How many days apart were the two battles? (September has 30 days.)  →  19 days
 Circulate: who gets 3/3 (Stretch route), 2/3 (Core), 0–1 (Support)? Use this to route pupils later in the lesson.</a:t>
             </a:r>
@@ -1503,7 +1503,7 @@
               <a:rPr lang="en-US" dirty="0"/>
               <a:t>Answers — pupils mark their own in a different colour, then hands up for 3/3, 2/3, 1/3.
 1. Senlac. The English held the top of Senlac Hill, which forced William's archers and cavalry to attack uphill.
-2. A   They pretended to retreat, and English soldiers chased them down the hill. The fake retreat drew English soldiers out of the wall and down the hill, where the Norman cavalry could kill them. Repeated, it broke the wall.
+2. D   They pretended to retreat, and English soldiers chased them down the hill. The fake retreat drew English soldiers out of the wall and down the hill, where the Norman cavalry could kill them. Repeated, it broke the wall.
 3. 19 days. 25 September to 30 September is 5 days; then 14 more days into October: 5 + 14 = 19.
 Say the route each score points to: 3/3 Stretch, 2/3 Core, 0–1 Support. Pupils may choose to move up.</a:t>
             </a:r>
@@ -5504,7 +5504,7 @@
                 <a:ea typeface="Calibri" pitchFamily="34" charset="-122"/>
                 <a:cs typeface="Calibri" pitchFamily="34" charset="-120"/>
               </a:rPr>
-              <a:t>The wind changing so that William could cross the Channel</a:t>
+              <a:t>Harold being killed late in the day</a:t>
             </a:r>
             <a:endParaRPr lang="en-US" sz="2600" dirty="0"/>
           </a:p>
@@ -5541,7 +5541,7 @@
                 <a:ea typeface="Calibri" pitchFamily="34" charset="-122"/>
                 <a:cs typeface="Calibri" pitchFamily="34" charset="-120"/>
               </a:rPr>
-              <a:t>Harold being killed late in the day</a:t>
+              <a:t>William happening to survive the battle</a:t>
             </a:r>
             <a:endParaRPr lang="en-US" sz="2600" dirty="0"/>
           </a:p>
@@ -5578,7 +5578,7 @@
                 <a:ea typeface="Calibri" pitchFamily="34" charset="-122"/>
                 <a:cs typeface="Calibri" pitchFamily="34" charset="-120"/>
               </a:rPr>
-              <a:t>William happening to survive the battle</a:t>
+              <a:t>The wind changing so that William could cross the Channel</a:t>
             </a:r>
             <a:endParaRPr lang="en-US" sz="2600" dirty="0"/>
           </a:p>
@@ -9142,7 +9142,7 @@
                 <a:ea typeface="Calibri" pitchFamily="34" charset="-122"/>
                 <a:cs typeface="Calibri" pitchFamily="34" charset="-120"/>
               </a:rPr>
-              <a:t>They pretended to retreat, and English soldiers chased them down the hill</a:t>
+              <a:t>They attacked at night</a:t>
             </a:r>
             <a:endParaRPr lang="en-US" sz="1800" dirty="0"/>
           </a:p>
@@ -9179,7 +9179,7 @@
                 <a:ea typeface="Calibri" pitchFamily="34" charset="-122"/>
                 <a:cs typeface="Calibri" pitchFamily="34" charset="-120"/>
               </a:rPr>
-              <a:t>They set fire to the shields</a:t>
+              <a:t>Hardrada's Vikings attacked the English from behind</a:t>
             </a:r>
             <a:endParaRPr lang="en-US" sz="1800" dirty="0"/>
           </a:p>
@@ -9216,7 +9216,7 @@
                 <a:ea typeface="Calibri" pitchFamily="34" charset="-122"/>
                 <a:cs typeface="Calibri" pitchFamily="34" charset="-120"/>
               </a:rPr>
-              <a:t>They attacked at night</a:t>
+              <a:t>They set fire to the shields</a:t>
             </a:r>
             <a:endParaRPr lang="en-US" sz="1800" dirty="0"/>
           </a:p>
@@ -9253,7 +9253,7 @@
                 <a:ea typeface="Calibri" pitchFamily="34" charset="-122"/>
                 <a:cs typeface="Calibri" pitchFamily="34" charset="-120"/>
               </a:rPr>
-              <a:t>Hardrada's Vikings attacked the English from behind</a:t>
+              <a:t>They pretended to retreat, and English soldiers chased them down the hill</a:t>
             </a:r>
             <a:endParaRPr lang="en-US" sz="1800" dirty="0"/>
           </a:p>
@@ -10102,7 +10102,7 @@
                 <a:ea typeface="Calibri" pitchFamily="34" charset="-122"/>
                 <a:cs typeface="Calibri" pitchFamily="34" charset="-120"/>
               </a:rPr>
-              <a:t>A   They pretended to retreat, and English soldiers chased them down the hill</a:t>
+              <a:t>D   They pretended to retreat, and English soldiers chased them down the hill</a:t>
             </a:r>
             <a:endParaRPr lang="en-US" sz="2200" dirty="0"/>
           </a:p>

--- a/decks/hist-hastings/hist-hastings_ch5_battle-of-hastings.pptx
+++ b/decks/hist-hastings/hist-hastings_ch5_battle-of-hastings.pptx
@@ -123,36 +123,36 @@
   <p:extLst>
     <p:ext uri="{521415D9-36F7-43E2-AB2F-B90AF26B5E84}">
       <p14:sectionLst xmlns:p14="http://schemas.microsoft.com/office/powerpoint/2010/main">
-        <p14:section name="Opening" id="{5fd0f0d5-166e-eed7-8a61-3de7f5180e09}">
+        <p14:section name="Opening" id="{50c87613-068b-7a19-c9b5-7779552c00d8}">
           <p14:sldIdLst>
             <p14:sldId id="256"/>
           </p14:sldIdLst>
         </p14:section>
-        <p14:section name="Gate" id="{53753498-3012-e9c1-ee01-bfbbce31b0f6}">
+        <p14:section name="Gate" id="{221bb275-5a70-a5df-f815-a919639cbaf0}">
           <p14:sldIdLst>
             <p14:sldId id="257"/>
             <p14:sldId id="258"/>
           </p14:sldIdLst>
         </p14:section>
-        <p14:section name="Pre-teach" id="{a3156f62-c6b2-eb10-d79b-80c8dc097d4f}">
+        <p14:section name="Pre-teach" id="{8fa9b053-8427-122b-651d-437f3e463d6d}">
           <p14:sldIdLst>
             <p14:sldId id="259"/>
           </p14:sldIdLst>
         </p14:section>
-        <p14:section name="Read-along" id="{080e17da-ec47-1474-b033-c44904940285}">
+        <p14:section name="Read-along" id="{c3a73b8e-65d1-3216-7403-689fc2279244}">
           <p14:sldIdLst>
             <p14:sldId id="260"/>
             <p14:sldId id="261"/>
           </p14:sldIdLst>
         </p14:section>
-        <p14:section name="Teach" id="{c1b16b61-04b0-adef-1544-ad5d4d7321b5}">
+        <p14:section name="Teach" id="{ad467808-a97b-924a-d2f5-1dd159b28063}">
           <p14:sldIdLst>
             <p14:sldId id="262"/>
             <p14:sldId id="263"/>
             <p14:sldId id="264"/>
           </p14:sldIdLst>
         </p14:section>
-        <p14:section name="Routes" id="{4d47841d-f8b1-d638-90ab-881e3e25d834}">
+        <p14:section name="Routes" id="{c296ea57-32fe-3f08-c553-cf5c653b1dc1}">
           <p14:sldIdLst>
             <p14:sldId id="265"/>
             <p14:sldId id="266"/>
@@ -160,12 +160,12 @@
             <p14:sldId id="268"/>
           </p14:sldIdLst>
         </p14:section>
-        <p14:section name="Close" id="{091ddd2b-4556-62fb-9f80-d1a5ab11fa2d}">
+        <p14:section name="Close" id="{ed10fd5e-e622-564b-f935-188288371051}">
           <p14:sldIdLst>
             <p14:sldId id="269"/>
           </p14:sldIdLst>
         </p14:section>
-        <p14:section name="Answers" id="{3540de31-16e4-7a01-6e01-4136563f0842}">
+        <p14:section name="Answers" id="{ced99c8a-0d0c-0ad7-3140-c8d2a1d49a71}">
           <p14:sldIdLst>
             <p14:sldId id="270"/>
             <p14:sldId id="271"/>
